--- a/week1_LinuxI/week1b.pptx
+++ b/week1_LinuxI/week1b.pptx
@@ -228,7 +228,7 @@
           <a:p>
             <a:fld id="{12427B52-3F12-BB40-B768-574A6EBC6087}" type="datetimeFigureOut">
               <a:rPr lang="en-US" smtClean="0"/>
-              <a:t>8/28/25</a:t>
+              <a:t>8/26/26</a:t>
             </a:fld>
             <a:endParaRPr lang="en-US"/>
           </a:p>
@@ -1013,7 +1013,7 @@
           <a:p>
             <a:fld id="{22D2DA61-07B7-C347-9103-BA4E0BBA73A5}" type="datetimeFigureOut">
               <a:rPr lang="en-US" smtClean="0"/>
-              <a:t>8/28/25</a:t>
+              <a:t>8/26/26</a:t>
             </a:fld>
             <a:endParaRPr lang="en-US"/>
           </a:p>
@@ -1181,7 +1181,7 @@
           <a:p>
             <a:fld id="{22D2DA61-07B7-C347-9103-BA4E0BBA73A5}" type="datetimeFigureOut">
               <a:rPr lang="en-US" smtClean="0"/>
-              <a:t>8/28/25</a:t>
+              <a:t>8/26/26</a:t>
             </a:fld>
             <a:endParaRPr lang="en-US"/>
           </a:p>
@@ -1359,7 +1359,7 @@
           <a:p>
             <a:fld id="{22D2DA61-07B7-C347-9103-BA4E0BBA73A5}" type="datetimeFigureOut">
               <a:rPr lang="en-US" smtClean="0"/>
-              <a:t>8/28/25</a:t>
+              <a:t>8/26/26</a:t>
             </a:fld>
             <a:endParaRPr lang="en-US"/>
           </a:p>
@@ -1527,7 +1527,7 @@
           <a:p>
             <a:fld id="{22D2DA61-07B7-C347-9103-BA4E0BBA73A5}" type="datetimeFigureOut">
               <a:rPr lang="en-US" smtClean="0"/>
-              <a:t>8/28/25</a:t>
+              <a:t>8/26/26</a:t>
             </a:fld>
             <a:endParaRPr lang="en-US"/>
           </a:p>
@@ -1772,7 +1772,7 @@
           <a:p>
             <a:fld id="{22D2DA61-07B7-C347-9103-BA4E0BBA73A5}" type="datetimeFigureOut">
               <a:rPr lang="en-US" smtClean="0"/>
-              <a:t>8/28/25</a:t>
+              <a:t>8/26/26</a:t>
             </a:fld>
             <a:endParaRPr lang="en-US"/>
           </a:p>
@@ -2057,7 +2057,7 @@
           <a:p>
             <a:fld id="{22D2DA61-07B7-C347-9103-BA4E0BBA73A5}" type="datetimeFigureOut">
               <a:rPr lang="en-US" smtClean="0"/>
-              <a:t>8/28/25</a:t>
+              <a:t>8/26/26</a:t>
             </a:fld>
             <a:endParaRPr lang="en-US"/>
           </a:p>
@@ -2476,7 +2476,7 @@
           <a:p>
             <a:fld id="{22D2DA61-07B7-C347-9103-BA4E0BBA73A5}" type="datetimeFigureOut">
               <a:rPr lang="en-US" smtClean="0"/>
-              <a:t>8/28/25</a:t>
+              <a:t>8/26/26</a:t>
             </a:fld>
             <a:endParaRPr lang="en-US"/>
           </a:p>
@@ -2593,7 +2593,7 @@
           <a:p>
             <a:fld id="{22D2DA61-07B7-C347-9103-BA4E0BBA73A5}" type="datetimeFigureOut">
               <a:rPr lang="en-US" smtClean="0"/>
-              <a:t>8/28/25</a:t>
+              <a:t>8/26/26</a:t>
             </a:fld>
             <a:endParaRPr lang="en-US"/>
           </a:p>
@@ -2688,7 +2688,7 @@
           <a:p>
             <a:fld id="{22D2DA61-07B7-C347-9103-BA4E0BBA73A5}" type="datetimeFigureOut">
               <a:rPr lang="en-US" smtClean="0"/>
-              <a:t>8/28/25</a:t>
+              <a:t>8/26/26</a:t>
             </a:fld>
             <a:endParaRPr lang="en-US"/>
           </a:p>
@@ -2963,7 +2963,7 @@
           <a:p>
             <a:fld id="{22D2DA61-07B7-C347-9103-BA4E0BBA73A5}" type="datetimeFigureOut">
               <a:rPr lang="en-US" smtClean="0"/>
-              <a:t>8/28/25</a:t>
+              <a:t>8/26/26</a:t>
             </a:fld>
             <a:endParaRPr lang="en-US"/>
           </a:p>
@@ -3215,7 +3215,7 @@
           <a:p>
             <a:fld id="{22D2DA61-07B7-C347-9103-BA4E0BBA73A5}" type="datetimeFigureOut">
               <a:rPr lang="en-US" smtClean="0"/>
-              <a:t>8/28/25</a:t>
+              <a:t>8/26/26</a:t>
             </a:fld>
             <a:endParaRPr lang="en-US"/>
           </a:p>
@@ -3426,7 +3426,7 @@
           <a:p>
             <a:fld id="{22D2DA61-07B7-C347-9103-BA4E0BBA73A5}" type="datetimeFigureOut">
               <a:rPr lang="en-US" smtClean="0"/>
-              <a:t>8/28/25</a:t>
+              <a:t>8/26/26</a:t>
             </a:fld>
             <a:endParaRPr lang="en-US"/>
           </a:p>
@@ -5962,7 +5962,7 @@
               <a:rPr lang="en-US" sz="2000" b="1" dirty="0" err="1">
                 <a:latin typeface="HELVETICA LIGHT" panose="020B0403020202020204" pitchFamily="34" charset="0"/>
               </a:rPr>
-              <a:t>unixI_primer.md</a:t>
+              <a:t>linux_primer.md</a:t>
             </a:r>
             <a:r>
               <a:rPr lang="en-US" sz="2000" b="1" dirty="0">
@@ -5980,7 +5980,7 @@
               <a:rPr lang="en-US" sz="2000" b="1" dirty="0">
                 <a:latin typeface="HELVETICA LIGHT" panose="020B0403020202020204" pitchFamily="34" charset="0"/>
               </a:rPr>
-              <a:t>week1_unixI</a:t>
+              <a:t>week1_LinuxI</a:t>
             </a:r>
           </a:p>
           <a:p>
@@ -6005,7 +6005,7 @@
               <a:rPr lang="en-US" sz="2000" b="1" dirty="0">
                 <a:latin typeface="HELVETICA LIGHT" panose="020B0403020202020204" pitchFamily="34" charset="0"/>
               </a:rPr>
-              <a:t>unix_assignment1.md, follow links to tutorials at end.</a:t>
+              <a:t>linux_assignment1.md, follow links to tutorials at end.</a:t>
             </a:r>
             <a:r>
               <a:rPr lang="en-US" sz="2000" dirty="0">
@@ -6028,7 +6028,7 @@
               <a:rPr lang="en-US" sz="2000" dirty="0">
                 <a:latin typeface="Helvetica Light" panose="020B0403020202020204" pitchFamily="34" charset="0"/>
               </a:rPr>
-              <a:t>-For the unix_assignment1.md tutorial, you will want to download  </a:t>
+              <a:t>-For the linux_assignment1.md tutorial, you will want to download  </a:t>
             </a:r>
             <a:r>
               <a:rPr lang="en-US" sz="2000" dirty="0" err="1">
@@ -6122,7 +6122,43 @@
               <a:rPr lang="en-US" sz="2000" dirty="0">
                 <a:latin typeface="Helvetica Light" panose="020B0403020202020204" pitchFamily="34" charset="0"/>
               </a:rPr>
-              <a:t>Be sure to 1. have Linux set up in a way that works for you 2., download a text editor, 3. explore resources in primers – find what will be most useful for you.</a:t>
+              <a:t>Be sure to </a:t>
+            </a:r>
+            <a:r>
+              <a:rPr lang="en-US" sz="2000" b="1" dirty="0">
+                <a:latin typeface="Helvetica Light" panose="020B0403020202020204" pitchFamily="34" charset="0"/>
+              </a:rPr>
+              <a:t>1. </a:t>
+            </a:r>
+            <a:r>
+              <a:rPr lang="en-US" sz="2000" dirty="0">
+                <a:latin typeface="Helvetica Light" panose="020B0403020202020204" pitchFamily="34" charset="0"/>
+              </a:rPr>
+              <a:t>have Linux set up in a way that works for you </a:t>
+            </a:r>
+            <a:r>
+              <a:rPr lang="en-US" sz="2000" b="1" dirty="0">
+                <a:latin typeface="Helvetica Light" panose="020B0403020202020204" pitchFamily="34" charset="0"/>
+              </a:rPr>
+              <a:t>2.</a:t>
+            </a:r>
+            <a:r>
+              <a:rPr lang="en-US" sz="2000" dirty="0">
+                <a:latin typeface="Helvetica Light" panose="020B0403020202020204" pitchFamily="34" charset="0"/>
+              </a:rPr>
+              <a:t>, download a text editor, </a:t>
+            </a:r>
+            <a:r>
+              <a:rPr lang="en-US" sz="2000" b="1" dirty="0">
+                <a:latin typeface="Helvetica Light" panose="020B0403020202020204" pitchFamily="34" charset="0"/>
+              </a:rPr>
+              <a:t>3.</a:t>
+            </a:r>
+            <a:r>
+              <a:rPr lang="en-US" sz="2000" dirty="0">
+                <a:latin typeface="Helvetica Light" panose="020B0403020202020204" pitchFamily="34" charset="0"/>
+              </a:rPr>
+              <a:t> explore resources in primers – find what will be most useful for you.</a:t>
             </a:r>
           </a:p>
           <a:p>
@@ -6140,7 +6176,19 @@
               <a:rPr lang="en-US" sz="2000" dirty="0">
                 <a:latin typeface="Helvetica Light" panose="020B0403020202020204" pitchFamily="34" charset="0"/>
               </a:rPr>
-              <a:t>- Work through primer, start getting comfortable with navigation and file operations, look ahead at week2 materials.</a:t>
+              <a:t>- Work through primer, start getting comfortable with navigation and file operations, look ahead at </a:t>
+            </a:r>
+            <a:r>
+              <a:rPr lang="en-US" sz="2000" b="1" dirty="0">
+                <a:latin typeface="Helvetica Light" panose="020B0403020202020204" pitchFamily="34" charset="0"/>
+              </a:rPr>
+              <a:t>week2</a:t>
+            </a:r>
+            <a:r>
+              <a:rPr lang="en-US" sz="2000" dirty="0">
+                <a:latin typeface="Helvetica Light" panose="020B0403020202020204" pitchFamily="34" charset="0"/>
+              </a:rPr>
+              <a:t> materials.</a:t>
             </a:r>
           </a:p>
         </p:txBody>
@@ -6262,7 +6310,7 @@
         <p:spPr>
           <a:xfrm>
             <a:off x="1920472" y="357678"/>
-            <a:ext cx="5303055" cy="523220"/>
+            <a:ext cx="5444119" cy="523220"/>
           </a:xfrm>
           <a:prstGeom prst="rect">
             <a:avLst/>
@@ -6279,7 +6327,7 @@
               <a:rPr lang="en-US" sz="2800" dirty="0">
                 <a:latin typeface="Helvetica Light" panose="020B0403020202020204" pitchFamily="34" charset="0"/>
               </a:rPr>
-              <a:t>Introduction to the Unix terminal</a:t>
+              <a:t>Introduction to the Linux terminal</a:t>
             </a:r>
           </a:p>
         </p:txBody>
@@ -6671,13 +6719,13 @@
               <a:rPr lang="en-US" sz="2200" dirty="0">
                 <a:latin typeface="Helvetica Light" panose="020B0403020202020204" pitchFamily="34" charset="0"/>
               </a:rPr>
-              <a:t>- Unix cheat sheets, and guides under “</a:t>
+              <a:t>- Linux cheat sheets, and guides under “</a:t>
             </a:r>
             <a:r>
               <a:rPr lang="en-US" sz="2200" dirty="0" err="1">
                 <a:latin typeface="Helvetica Light" panose="020B0403020202020204" pitchFamily="34" charset="0"/>
               </a:rPr>
-              <a:t>unix_resources</a:t>
+              <a:t>Linux_resources</a:t>
             </a:r>
             <a:r>
               <a:rPr lang="en-US" sz="2200" dirty="0">
@@ -7190,7 +7238,7 @@
         <p:spPr>
           <a:xfrm>
             <a:off x="674906" y="501528"/>
-            <a:ext cx="7782900" cy="523220"/>
+            <a:ext cx="7754046" cy="523220"/>
           </a:xfrm>
           <a:prstGeom prst="rect">
             <a:avLst/>
@@ -7207,7 +7255,7 @@
               <a:rPr lang="en-US" sz="2800" b="1" dirty="0">
                 <a:latin typeface="HELVETICA LIGHT" panose="020B0403020202020204" pitchFamily="34" charset="0"/>
               </a:rPr>
-              <a:t>Unix terminal can be used for nearly everything</a:t>
+              <a:t>Linux terminal can be used for nearly everything</a:t>
             </a:r>
           </a:p>
         </p:txBody>
@@ -7337,7 +7385,7 @@
               <a:rPr lang="en-US" sz="2000" dirty="0">
                 <a:latin typeface="Helvetica Light" panose="020B0403020202020204" pitchFamily="34" charset="0"/>
               </a:rPr>
-              <a:t>There are tens of thousands of commands, depending on the system you are using.</a:t>
+              <a:t>There are tens/hundreds of thousands of commands, depending on the system you are using.</a:t>
             </a:r>
           </a:p>
         </p:txBody>
@@ -7600,7 +7648,7 @@
         <p:spPr>
           <a:xfrm>
             <a:off x="2557024" y="364521"/>
-            <a:ext cx="3943708" cy="523220"/>
+            <a:ext cx="4084773" cy="523220"/>
           </a:xfrm>
           <a:prstGeom prst="rect">
             <a:avLst/>
@@ -7617,7 +7665,7 @@
               <a:rPr lang="en-US" sz="2800" dirty="0">
                 <a:latin typeface="Helvetica Light" panose="020B0403020202020204" pitchFamily="34" charset="0"/>
               </a:rPr>
-              <a:t>Unix directory structure</a:t>
+              <a:t>Linux directory structure</a:t>
             </a:r>
           </a:p>
         </p:txBody>
@@ -7643,8 +7691,8 @@
         </p:blipFill>
         <p:spPr>
           <a:xfrm>
-            <a:off x="3137018" y="1416185"/>
-            <a:ext cx="5905985" cy="5157721"/>
+            <a:off x="2557024" y="909675"/>
+            <a:ext cx="6485979" cy="5664232"/>
           </a:xfrm>
           <a:prstGeom prst="rect">
             <a:avLst/>

--- a/week1_LinuxI/week1b.pptx
+++ b/week1_LinuxI/week1b.pptx
@@ -5936,7 +5936,7 @@
         <p:spPr>
           <a:xfrm>
             <a:off x="696426" y="1008497"/>
-            <a:ext cx="7699685" cy="2862322"/>
+            <a:ext cx="7699685" cy="3170099"/>
           </a:xfrm>
           <a:prstGeom prst="rect">
             <a:avLst/>
@@ -6007,12 +6007,9 @@
               </a:rPr>
               <a:t>linux_assignment1.md, follow links to tutorials at end.</a:t>
             </a:r>
-            <a:r>
-              <a:rPr lang="en-US" sz="2000" dirty="0">
-                <a:latin typeface="Helvetica Light" panose="020B0403020202020204" pitchFamily="34" charset="0"/>
-              </a:rPr>
-              <a:t>.</a:t>
-            </a:r>
+            <a:endParaRPr lang="en-US" sz="2000" dirty="0">
+              <a:latin typeface="Helvetica Light" panose="020B0403020202020204" pitchFamily="34" charset="0"/>
+            </a:endParaRPr>
           </a:p>
           <a:p>
             <a:pPr marL="342900" indent="-342900">
@@ -6064,7 +6061,13 @@
               <a:rPr lang="en-US" sz="2000" dirty="0">
                 <a:latin typeface="Helvetica Light" panose="020B0403020202020204" pitchFamily="34" charset="0"/>
               </a:rPr>
-              <a:t> page, under week1.</a:t>
+              <a:t> page, under week1 </a:t>
+            </a:r>
+            <a:r>
+              <a:rPr lang="en-US" sz="1500" dirty="0">
+                <a:latin typeface="Helvetica Light" panose="020B0403020202020204" pitchFamily="34" charset="0"/>
+              </a:rPr>
+              <a:t>(or if you clone to repo, you will have it on your local machine, preferred).</a:t>
             </a:r>
           </a:p>
           <a:p>
